--- a/submission/FitzSight_GOAI_Initial_Round.pptx
+++ b/submission/FitzSight_GOAI_Initial_Round.pptx
@@ -11335,7 +11335,7 @@
         <p:spPr>
           <a:xfrm>
             <a:off x="2834640" y="3291839"/>
-            <a:ext cx="2926308" cy="146304"/>
+            <a:ext cx="3108960" cy="146304"/>
           </a:xfrm>
           <a:prstGeom prst="rect">
             <a:avLst/>
@@ -11495,7 +11495,7 @@
         <p:spPr>
           <a:xfrm>
             <a:off x="2834640" y="3840480"/>
-            <a:ext cx="470230" cy="146304"/>
+            <a:ext cx="501602" cy="146304"/>
           </a:xfrm>
           <a:prstGeom prst="rect">
             <a:avLst/>
@@ -11676,7 +11676,7 @@
                 </a:solidFill>
                 <a:latin typeface="Liberation Sans"/>
               </a:rPr>
-              <a:t>• Response latency shifted sharply after routing change</a:t>
+              <a:t>• Response latency shifted by +29.15 minutes after the routing change</a:t>
             </a:r>
           </a:p>
         </p:txBody>
@@ -11711,7 +11711,7 @@
                 </a:solidFill>
                 <a:latin typeface="Liberation Sans"/>
               </a:rPr>
-              <a:t>• Team A / Team B dominate negative contribution</a:t>
+              <a:t>• Team A is the largest negative team-level contributor</a:t>
             </a:r>
           </a:p>
         </p:txBody>
@@ -11746,7 +11746,7 @@
                 </a:solidFill>
                 <a:latin typeface="Liberation Sans"/>
               </a:rPr>
-              <a:t>• Nearby CRM routing event exists in business-event log</a:t>
+              <a:t>• Nearby CRM routing event exists in the business-event log</a:t>
             </a:r>
           </a:p>
         </p:txBody>
@@ -11781,7 +11781,7 @@
                 </a:solidFill>
                 <a:latin typeface="Liberation Sans"/>
               </a:rPr>
-              <a:t>• Verifier preserves causal-language guardrail</a:t>
+              <a:t>• 8 post-change response-time days exceed the robust threshold</a:t>
             </a:r>
           </a:p>
         </p:txBody>
@@ -12187,7 +12187,7 @@
                 </a:solidFill>
                 <a:latin typeface="Liberation Sans"/>
               </a:rPr>
-              <a:t>-$223.9k</a:t>
+              <a:t>-$187.8k</a:t>
             </a:r>
           </a:p>
         </p:txBody>
@@ -12302,7 +12302,7 @@
                 </a:solidFill>
                 <a:latin typeface="Liberation Sans"/>
               </a:rPr>
-              <a:t>+$24.4k</a:t>
+              <a:t>+$59.2k</a:t>
             </a:r>
           </a:p>
         </p:txBody>
@@ -12417,7 +12417,7 @@
                 </a:solidFill>
                 <a:latin typeface="Liberation Sans"/>
               </a:rPr>
-              <a:t>+$248.3k</a:t>
+              <a:t>+$246.9k</a:t>
             </a:r>
           </a:p>
         </p:txBody>
@@ -12532,7 +12532,7 @@
                 </a:solidFill>
                 <a:latin typeface="Liberation Sans"/>
               </a:rPr>
-              <a:t>92.2%</a:t>
+              <a:t>91.6%</a:t>
             </a:r>
           </a:p>
         </p:txBody>
@@ -12741,7 +12741,7 @@
         <p:spPr>
           <a:xfrm>
             <a:off x="3063240" y="3886200"/>
-            <a:ext cx="379293" cy="146304"/>
+            <a:ext cx="930963" cy="146304"/>
           </a:xfrm>
           <a:prstGeom prst="rect">
             <a:avLst/>
@@ -12807,7 +12807,7 @@
                 </a:solidFill>
                 <a:latin typeface="Liberation Sans"/>
               </a:rPr>
-              <a:t>+24.4k</a:t>
+              <a:t>+59.2k</a:t>
             </a:r>
           </a:p>
         </p:txBody>
@@ -12901,7 +12901,7 @@
         <p:spPr>
           <a:xfrm>
             <a:off x="3063240" y="4297680"/>
-            <a:ext cx="3859773" cy="146304"/>
+            <a:ext cx="3886200" cy="146304"/>
           </a:xfrm>
           <a:prstGeom prst="rect">
             <a:avLst/>
@@ -12967,7 +12967,7 @@
                 </a:solidFill>
                 <a:latin typeface="Liberation Sans"/>
               </a:rPr>
-              <a:t>-248.3k</a:t>
+              <a:t>-246.9k</a:t>
             </a:r>
           </a:p>
         </p:txBody>
@@ -13061,7 +13061,7 @@
         <p:spPr>
           <a:xfrm>
             <a:off x="3063240" y="4709160"/>
-            <a:ext cx="3480480" cy="146304"/>
+            <a:ext cx="2955236" cy="146304"/>
           </a:xfrm>
           <a:prstGeom prst="rect">
             <a:avLst/>
@@ -13127,7 +13127,7 @@
                 </a:solidFill>
                 <a:latin typeface="Liberation Sans"/>
               </a:rPr>
-              <a:t>-223.9k</a:t>
+              <a:t>-187.8k</a:t>
             </a:r>
           </a:p>
         </p:txBody>
@@ -14163,7 +14163,7 @@
                 </a:solidFill>
                 <a:latin typeface="Liberation Sans"/>
               </a:rPr>
-              <a:t>4.1%</a:t>
+              <a:t>3.7%</a:t>
             </a:r>
           </a:p>
         </p:txBody>
@@ -14278,7 +14278,7 @@
                 </a:solidFill>
                 <a:latin typeface="Liberation Sans"/>
               </a:rPr>
-              <a:t>55.8%</a:t>
+              <a:t>53.7%</a:t>
             </a:r>
           </a:p>
         </p:txBody>
@@ -16931,7 +16931,7 @@
                 </a:solidFill>
                 <a:latin typeface="Liberation Sans"/>
               </a:rPr>
-              <a:t>Office move</a:t>
+              <a:t>Office Relocation</a:t>
             </a:r>
           </a:p>
         </p:txBody>
